--- a/Presntations/ARIA_Commercial_Presentation_Ghazi_Mabrouki_FINAL.pptx
+++ b/Presntations/ARIA_Commercial_Presentation_Ghazi_Mabrouki_FINAL.pptx
@@ -13,6 +13,7 @@
     <p:sldId id="261" r:id="rId13"/>
     <p:sldId id="262" r:id="rId14"/>
     <p:sldId id="279" r:id="rId32"/>
+    <p:sldId id="280" r:id="rId33"/>
     <p:sldId id="263" r:id="rId15"/>
     <p:sldId id="264" r:id="rId16"/>
     <p:sldId id="265" r:id="rId17"/>
@@ -7872,7 +7873,7 @@
                 <a:latin typeface="Liter"/>
                 <a:ea typeface="Liter"/>
               </a:rPr>
-              <a:t>11</a:t>
+              <a:t>12</a:t>
             </a:r>
           </a:p>
         </p:txBody>
@@ -9892,7 +9893,7 @@
                 <a:latin typeface="Liter"/>
                 <a:ea typeface="Liter"/>
               </a:rPr>
-              <a:t>12</a:t>
+              <a:t>13</a:t>
             </a:r>
           </a:p>
         </p:txBody>
@@ -11781,7 +11782,7 @@
                 <a:latin typeface="Liter"/>
                 <a:ea typeface="Liter"/>
               </a:rPr>
-              <a:t>13</a:t>
+              <a:t>14</a:t>
             </a:r>
           </a:p>
         </p:txBody>
@@ -13789,7 +13790,7 @@
                 <a:latin typeface="Liter"/>
                 <a:ea typeface="Liter"/>
               </a:rPr>
-              <a:t>15</a:t>
+              <a:t>16</a:t>
             </a:r>
           </a:p>
         </p:txBody>
@@ -15886,7 +15887,7 @@
                 <a:latin typeface="Liter"/>
                 <a:ea typeface="Liter"/>
               </a:rPr>
-              <a:t>16</a:t>
+              <a:t>17</a:t>
             </a:r>
           </a:p>
         </p:txBody>
@@ -17617,7 +17618,7 @@
                 <a:latin typeface="Liter"/>
                 <a:ea typeface="Liter"/>
               </a:rPr>
-              <a:t>17</a:t>
+              <a:t>18</a:t>
             </a:r>
           </a:p>
         </p:txBody>
@@ -19805,7 +19806,7 @@
                 <a:latin typeface="Liter"/>
                 <a:ea typeface="Liter"/>
               </a:rPr>
-              <a:t>19</a:t>
+              <a:t>20</a:t>
             </a:r>
           </a:p>
         </p:txBody>
@@ -22680,7 +22681,7 @@
                 <a:latin typeface="Liter"/>
                 <a:ea typeface="Liter"/>
               </a:rPr>
-              <a:t>20</a:t>
+              <a:t>21</a:t>
             </a:r>
           </a:p>
         </p:txBody>
@@ -25007,7 +25008,7 @@
                 <a:latin typeface="Liter"/>
                 <a:ea typeface="Liter"/>
               </a:rPr>
-              <a:t>22</a:t>
+              <a:t>23</a:t>
             </a:r>
           </a:p>
         </p:txBody>
@@ -26863,7 +26864,7 @@
                 <a:latin typeface="Liter"/>
                 <a:ea typeface="Liter"/>
               </a:rPr>
-              <a:t>23</a:t>
+              <a:t>24</a:t>
             </a:r>
           </a:p>
         </p:txBody>
@@ -27319,6 +27320,266 @@
           <a:lstStyle/>
           <a:p>
             <a:pPr algn="ctr"/>
+          </a:p>
+        </p:txBody>
+      </p:sp>
+    </p:spTree>
+  </p:cSld>
+  <p:clrMapOvr>
+    <a:masterClrMapping/>
+  </p:clrMapOvr>
+</p:sld>
+</file>
+
+<file path=ppt/slides/slide25.xml><?xml version="1.0" encoding="utf-8"?>
+<p:sld xmlns:a="http://schemas.openxmlformats.org/drawingml/2006/main" xmlns:p="http://schemas.openxmlformats.org/presentationml/2006/main" xmlns:r="http://schemas.openxmlformats.org/officeDocument/2006/relationships">
+  <p:cSld>
+    <p:spTree>
+      <p:nvGrpSpPr>
+        <p:cNvPr id="1" name=""/>
+        <p:cNvGrpSpPr/>
+        <p:nvPr/>
+      </p:nvGrpSpPr>
+      <p:grpSpPr/>
+      <p:sp>
+        <p:nvSpPr>
+          <p:cNvPr id="2" name="TextBox 1"/>
+          <p:cNvSpPr txBox="1"/>
+          <p:nvPr/>
+        </p:nvSpPr>
+        <p:spPr>
+          <a:xfrm>
+            <a:off x="758952" y="274320"/>
+            <a:ext cx="3657600" cy="228600"/>
+          </a:xfrm>
+          <a:prstGeom prst="rect">
+            <a:avLst/>
+          </a:prstGeom>
+          <a:noFill/>
+        </p:spPr>
+        <p:txBody>
+          <a:bodyPr wrap="square" lIns="0" rIns="0" tIns="0" bIns="0">
+            <a:spAutoFit/>
+          </a:bodyPr>
+          <a:lstStyle/>
+          <a:p>
+            <a:pPr algn="l"/>
+            <a:r>
+              <a:rPr sz="1050" b="0">
+                <a:solidFill>
+                  <a:srgbClr val="D4A373"/>
+                </a:solidFill>
+                <a:latin typeface="Liter"/>
+              </a:rPr>
+              <a:t>LIVE PRODUCT</a:t>
+            </a:r>
+          </a:p>
+        </p:txBody>
+      </p:sp>
+      <p:sp>
+        <p:nvSpPr>
+          <p:cNvPr id="3" name="TextBox 2"/>
+          <p:cNvSpPr txBox="1"/>
+          <p:nvPr/>
+        </p:nvSpPr>
+        <p:spPr>
+          <a:xfrm>
+            <a:off x="758952" y="502920"/>
+            <a:ext cx="10515600" cy="640080"/>
+          </a:xfrm>
+          <a:prstGeom prst="rect">
+            <a:avLst/>
+          </a:prstGeom>
+          <a:noFill/>
+        </p:spPr>
+        <p:txBody>
+          <a:bodyPr wrap="square" lIns="0" rIns="0" tIns="0" bIns="0">
+            <a:spAutoFit/>
+          </a:bodyPr>
+          <a:lstStyle/>
+          <a:p>
+            <a:pPr algn="l"/>
+            <a:r>
+              <a:rPr sz="2700" b="0">
+                <a:solidFill>
+                  <a:srgbClr val="2D6A6A"/>
+                </a:solidFill>
+                <a:latin typeface="Liter"/>
+              </a:rPr>
+              <a:t>See ARIA in Action — the Full Platform</a:t>
+            </a:r>
+          </a:p>
+        </p:txBody>
+      </p:sp>
+      <p:sp>
+        <p:nvSpPr>
+          <p:cNvPr id="4" name="Rectangle 3"/>
+          <p:cNvSpPr/>
+          <p:nvPr/>
+        </p:nvSpPr>
+        <p:spPr>
+          <a:xfrm>
+            <a:off x="758952" y="1051560"/>
+            <a:ext cx="758952" cy="36576"/>
+          </a:xfrm>
+          <a:prstGeom prst="rect">
+            <a:avLst/>
+          </a:prstGeom>
+          <a:solidFill>
+            <a:srgbClr val="D4A373"/>
+          </a:solidFill>
+          <a:ln>
+            <a:noFill/>
+          </a:ln>
+        </p:spPr>
+        <p:style>
+          <a:lnRef idx="1">
+            <a:schemeClr val="accent1"/>
+          </a:lnRef>
+          <a:fillRef idx="3">
+            <a:schemeClr val="accent1"/>
+          </a:fillRef>
+          <a:effectRef idx="2">
+            <a:schemeClr val="accent1"/>
+          </a:effectRef>
+          <a:fontRef idx="minor">
+            <a:schemeClr val="lt1"/>
+          </a:fontRef>
+        </p:style>
+        <p:txBody>
+          <a:bodyPr rtlCol="0" anchor="ctr"/>
+          <a:lstStyle/>
+          <a:p>
+            <a:pPr algn="ctr"/>
+          </a:p>
+        </p:txBody>
+      </p:sp>
+      <p:pic>
+        <p:nvPicPr>
+          <p:cNvPr id="5" name="Picture 4" descr="board_comm.png"/>
+          <p:cNvPicPr>
+            <a:picLocks noChangeAspect="1"/>
+          </p:cNvPicPr>
+          <p:nvPr/>
+        </p:nvPicPr>
+        <p:blipFill>
+          <a:blip r:embed="rId2"/>
+          <a:stretch>
+            <a:fillRect/>
+          </a:stretch>
+        </p:blipFill>
+        <p:spPr>
+          <a:xfrm>
+            <a:off x="838047" y="1371600"/>
+            <a:ext cx="10515600" cy="4293870"/>
+          </a:xfrm>
+          <a:prstGeom prst="rect">
+            <a:avLst/>
+          </a:prstGeom>
+        </p:spPr>
+      </p:pic>
+      <p:sp>
+        <p:nvSpPr>
+          <p:cNvPr id="6" name="TextBox 5"/>
+          <p:cNvSpPr txBox="1"/>
+          <p:nvPr/>
+        </p:nvSpPr>
+        <p:spPr>
+          <a:xfrm>
+            <a:off x="758952" y="5943600"/>
+            <a:ext cx="10515600" cy="365760"/>
+          </a:xfrm>
+          <a:prstGeom prst="rect">
+            <a:avLst/>
+          </a:prstGeom>
+          <a:noFill/>
+        </p:spPr>
+        <p:txBody>
+          <a:bodyPr wrap="square" lIns="0" rIns="0" tIns="0" bIns="0">
+            <a:spAutoFit/>
+          </a:bodyPr>
+          <a:lstStyle/>
+          <a:p>
+            <a:pPr algn="l"/>
+            <a:r>
+              <a:rPr sz="1650" b="0">
+                <a:solidFill>
+                  <a:srgbClr val="5C6B73"/>
+                </a:solidFill>
+                <a:latin typeface="QuattrocentoSans"/>
+              </a:rPr>
+              <a:t>Dashboard, AI-gated investigations, natural-language operator and runtime defense — one platform.</a:t>
+            </a:r>
+          </a:p>
+        </p:txBody>
+      </p:sp>
+      <p:sp>
+        <p:nvSpPr>
+          <p:cNvPr id="7" name="TextBox 6"/>
+          <p:cNvSpPr txBox="1"/>
+          <p:nvPr/>
+        </p:nvSpPr>
+        <p:spPr>
+          <a:xfrm>
+            <a:off x="571500" y="6572707"/>
+            <a:ext cx="1904695" cy="190195"/>
+          </a:xfrm>
+          <a:prstGeom prst="rect">
+            <a:avLst/>
+          </a:prstGeom>
+          <a:noFill/>
+        </p:spPr>
+        <p:txBody>
+          <a:bodyPr wrap="square" lIns="0" rIns="0" tIns="0" bIns="0">
+            <a:spAutoFit/>
+          </a:bodyPr>
+          <a:lstStyle/>
+          <a:p>
+            <a:pPr algn="l"/>
+            <a:r>
+              <a:rPr sz="825" b="0">
+                <a:solidFill>
+                  <a:srgbClr val="5C6B73"/>
+                </a:solidFill>
+                <a:latin typeface="Liter"/>
+              </a:rPr>
+              <a:t>GHAZI MABROUKI</a:t>
+            </a:r>
+          </a:p>
+        </p:txBody>
+      </p:sp>
+      <p:sp>
+        <p:nvSpPr>
+          <p:cNvPr id="8" name="dsl:footer-page"/>
+          <p:cNvSpPr txBox="1"/>
+          <p:nvPr/>
+        </p:nvSpPr>
+        <p:spPr>
+          <a:xfrm>
+            <a:off x="11239804" y="6572707"/>
+            <a:ext cx="381304" cy="190195"/>
+          </a:xfrm>
+          <a:prstGeom prst="rect">
+            <a:avLst/>
+          </a:prstGeom>
+          <a:noFill/>
+        </p:spPr>
+        <p:txBody>
+          <a:bodyPr wrap="square" lIns="0" rIns="0" tIns="0" bIns="0">
+            <a:spAutoFit/>
+          </a:bodyPr>
+          <a:lstStyle/>
+          <a:p>
+            <a:pPr algn="r"/>
+            <a:r>
+              <a:rPr sz="900" b="0">
+                <a:solidFill>
+                  <a:srgbClr val="5C6B73"/>
+                </a:solidFill>
+                <a:latin typeface="Liter"/>
+              </a:rPr>
+              <a:t>9</a:t>
+            </a:r>
           </a:p>
         </p:txBody>
       </p:sp>
@@ -36814,7 +37075,7 @@
                 <a:latin typeface="Liter"/>
                 <a:ea typeface="Liter"/>
               </a:rPr>
-              <a:t>9</a:t>
+              <a:t>10</a:t>
             </a:r>
           </a:p>
         </p:txBody>
